--- a/Avances_Tesis_2do_Semestre_RESPALDO.pptx
+++ b/Avances_Tesis_2do_Semestre_RESPALDO.pptx
@@ -2236,7 +2236,7 @@
           <a:bodyPr/>
           <a:lstStyle/>
           <a:p>
-            <a:endParaRPr lang="es-MX"/>
+            <a:endParaRPr lang="es-MX" dirty="0"/>
           </a:p>
         </p:txBody>
       </p:sp>
@@ -3045,6 +3045,47 @@
               <a:t>¡El problema, los objetivos, el estado del arte y la propuesta del sistema! 🌎</a:t>
             </a:r>
             <a:endParaRPr lang="en-US" sz="1100" dirty="0"/>
+          </a:p>
+        </p:txBody>
+      </p:sp>
+      <p:sp>
+        <p:nvSpPr>
+          <p:cNvPr id="25" name="CuadroTexto 24">
+            <a:extLst>
+              <a:ext uri="{FF2B5EF4-FFF2-40B4-BE49-F238E27FC236}">
+                <a16:creationId xmlns:a16="http://schemas.microsoft.com/office/drawing/2014/main" id="{7344DE79-0BF5-6AE9-93B5-AEBAF3E9A2D8}"/>
+              </a:ext>
+            </a:extLst>
+          </p:cNvPr>
+          <p:cNvSpPr txBox="1"/>
+          <p:nvPr/>
+        </p:nvSpPr>
+        <p:spPr>
+          <a:xfrm>
+            <a:off x="6309360" y="6331789"/>
+            <a:ext cx="5672731" cy="369332"/>
+          </a:xfrm>
+          <a:prstGeom prst="rect">
+            <a:avLst/>
+          </a:prstGeom>
+          <a:noFill/>
+        </p:spPr>
+        <p:txBody>
+          <a:bodyPr wrap="square" rtlCol="0">
+            <a:spAutoFit/>
+          </a:bodyPr>
+          <a:lstStyle/>
+          <a:p>
+            <a:r>
+              <a:rPr lang="es-MX" dirty="0">
+                <a:hlinkClick r:id="rId7"/>
+              </a:rPr>
+              <a:t>https://minato97.github.io/presentacion_tesis_2/#1</a:t>
+            </a:r>
+            <a:r>
+              <a:rPr lang="es-MX" dirty="0"/>
+              <a:t> </a:t>
+            </a:r>
           </a:p>
         </p:txBody>
       </p:sp>
